--- a/slides/ARC3133_Class05.pptx
+++ b/slides/ARC3133_Class05.pptx
@@ -3177,7 +3177,7 @@
                 </a:solidFill>
                 <a:latin typeface="Arial"/>
               </a:rPr>
-              <a:t>CLASS 05  /  SEP 22  /  U04</a:t>
+              <a:t>CLASS 05  /  SEP 22</a:t>
             </a:r>
           </a:p>
         </p:txBody>
